--- a/public/fun/pack/pptx/talkpro/발표템플릿프리미엄_41_사업제안_플래티넘아이스.pptx
+++ b/public/fun/pack/pptx/talkpro/발표템플릿프리미엄_41_사업제안_플래티넘아이스.pptx
@@ -115,12 +115,12 @@
   <p:extLst>
     <p:ext uri="{521415D9-36F7-43E2-AB2F-B90AF26B5E84}">
       <p14:sectionLst xmlns:p14="http://schemas.microsoft.com/office/powerpoint/2010/main">
-        <p14:section name="시작" id="{515FF8BE-3E8F-43AA-B3FF-863027CA8DE6}">
+        <p14:section name="시작" id="{5ADF7024-C2F9-483B-BD78-9A665157AC3D}">
           <p14:sldIdLst>
             <p14:sldId id="256"/>
           </p14:sldIdLst>
         </p14:section>
-        <p14:section name="본문" id="{BB6055DB-E8F1-4DF0-B580-8D11A4792F19}">
+        <p14:section name="본문" id="{FC3513A9-BF7E-41F9-A550-97D7BA778E48}">
           <p14:sldIdLst>
             <p14:sldId id="257"/>
             <p14:sldId id="258"/>
@@ -131,7 +131,7 @@
             <p14:sldId id="263"/>
           </p14:sldIdLst>
         </p14:section>
-        <p14:section name="마무리" id="{7D50079C-23B3-4784-B725-158D9061F441}">
+        <p14:section name="마무리" id="{E06319ED-C5C8-4D74-B512-498CD7EFD2A4}">
           <p14:sldIdLst>
             <p14:sldId id="264"/>
           </p14:sldIdLst>
@@ -1884,7 +1884,7 @@
             </a:lvl1pPr>
           </a:lstStyle>
           <a:p>
-            <a:fld id="{FD15522B-649E-44A1-AC6D-225808263B9F}" type="slidenum">
+            <a:fld id="{F8C9755B-B119-4642-A530-2D58F9B86C13}" type="slidenum">
               <a:rPr lang="en-US"/>
               <a:t>‹#›</a:t>
             </a:fld>
@@ -3173,7 +3173,7 @@
             </a:lvl1pPr>
           </a:lstStyle>
           <a:p>
-            <a:fld id="{E24D9E6B-70D1-404C-B094-DA00BC15AB34}" type="slidenum">
+            <a:fld id="{3A9C3B56-E98F-4664-BDED-1B5D90E582AD}" type="slidenum">
               <a:rPr lang="en-US"/>
               <a:t>‹#›</a:t>
             </a:fld>
@@ -4463,7 +4463,7 @@
             </a:lvl1pPr>
           </a:lstStyle>
           <a:p>
-            <a:fld id="{9F649022-F962-4334-956F-41CE5C43CF5E}" type="slidenum">
+            <a:fld id="{D990A862-23BF-476B-8B13-8F398FED500D}" type="slidenum">
               <a:rPr lang="en-US"/>
               <a:t>‹#›</a:t>
             </a:fld>
@@ -5966,7 +5966,7 @@
           <a:p>
             <a:r>
               <a:rPr lang="ko-KR"/>
-              <a:t>내년 예산에 반영할 안을 가져왔습니다</a:t>
+              <a:t>다음 예산에 반영할 안을 가져왔습니다</a:t>
             </a:r>
           </a:p>
         </p:txBody>
@@ -5994,7 +5994,7 @@
           <a:p>
             <a:r>
               <a:rPr lang="ko-KR"/>
-              <a:t>0000. 00. 00</a:t>
+              <a:t>날짜 입력</a:t>
             </a:r>
           </a:p>
         </p:txBody>
@@ -6079,7 +6079,7 @@
           <a:bodyPr/>
           <a:lstStyle/>
           <a:p>
-            <a:fld id="{3D013661-8A70-48BC-9193-08E8A957443B}" type="slidenum">
+            <a:fld id="{8F4274FB-12EB-4F69-8287-0F5AD1FC4E92}" type="slidenum">
               <a:rPr lang="en-US"/>
               <a:t>‹#›</a:t>
             </a:fld>
@@ -7189,7 +7189,7 @@
           <a:bodyPr/>
           <a:lstStyle/>
           <a:p>
-            <a:fld id="{B4CD152D-1CF8-4D91-8BB8-BCB0D85314FB}" type="slidenum">
+            <a:fld id="{9C354FD1-9B99-4137-8850-916065306A4F}" type="slidenum">
               <a:rPr lang="en-US"/>
               <a:t>‹#›</a:t>
             </a:fld>
@@ -7277,7 +7277,7 @@
           <a:bodyPr/>
           <a:lstStyle/>
           <a:p>
-            <a:fld id="{3C60F6C3-2CB9-4B25-A48C-0B2E623D6C86}" type="slidenum">
+            <a:fld id="{B2A8F9EA-7492-485A-A4B0-BA7D201355D4}" type="slidenum">
               <a:rPr lang="en-US"/>
               <a:t>‹#›</a:t>
             </a:fld>
@@ -8181,7 +8181,7 @@
           <a:bodyPr/>
           <a:lstStyle/>
           <a:p>
-            <a:fld id="{2230295D-C230-47B5-A6CA-791D92E2187B}" type="slidenum">
+            <a:fld id="{4B6511C2-63E2-4D44-BA22-D67F59A58DFF}" type="slidenum">
               <a:rPr lang="en-US"/>
               <a:t>‹#›</a:t>
             </a:fld>
@@ -8783,7 +8783,7 @@
           <a:bodyPr/>
           <a:lstStyle/>
           <a:p>
-            <a:fld id="{4FDA3879-ED08-4450-A68A-F0246A2BB03B}" type="slidenum">
+            <a:fld id="{A5147AB9-842F-4E12-80B4-9B776DA0B0E8}" type="slidenum">
               <a:rPr lang="en-US"/>
               <a:t>‹#›</a:t>
             </a:fld>
@@ -8966,7 +8966,7 @@
           <a:bodyPr/>
           <a:lstStyle/>
           <a:p>
-            <a:fld id="{9155BA4F-35EA-4249-9F5E-98A0FBB1B912}" type="slidenum">
+            <a:fld id="{78BD479F-9746-4AE2-B075-04DFB2AC139C}" type="slidenum">
               <a:rPr lang="en-US"/>
               <a:t>‹#›</a:t>
             </a:fld>
@@ -10030,7 +10030,7 @@
           <a:bodyPr/>
           <a:lstStyle/>
           <a:p>
-            <a:fld id="{FF4C03A6-CED8-4392-9709-F7BEBA0A3589}" type="slidenum">
+            <a:fld id="{C8DA3652-1FFD-4CBD-A2DC-5B60F45FB3C8}" type="slidenum">
               <a:rPr lang="en-US"/>
               <a:t>‹#›</a:t>
             </a:fld>
